--- a/SPRING BOOT/Quarkus_vs_SpringBoot.pptx
+++ b/SPRING BOOT/Quarkus_vs_SpringBoot.pptx
@@ -10,11 +10,11 @@
     <p:sldId id="258" r:id="rId4"/>
     <p:sldId id="259" r:id="rId5"/>
     <p:sldId id="260" r:id="rId6"/>
-    <p:sldId id="261" r:id="rId7"/>
-    <p:sldId id="270" r:id="rId8"/>
+    <p:sldId id="283" r:id="rId7"/>
+    <p:sldId id="285" r:id="rId8"/>
     <p:sldId id="271" r:id="rId9"/>
-    <p:sldId id="265" r:id="rId10"/>
-    <p:sldId id="268" r:id="rId11"/>
+    <p:sldId id="268" r:id="rId10"/>
+    <p:sldId id="286" r:id="rId11"/>
     <p:sldId id="282" r:id="rId12"/>
   </p:sldIdLst>
   <p:sldSz cx="9144000" cy="6858000" type="screen4x3"/>
@@ -312,7 +312,7 @@
           <a:p>
             <a:fld id="{5BCAD085-E8A6-8845-BD4E-CB4CCA059FC4}" type="datetimeFigureOut">
               <a:rPr lang="en-US" smtClean="0"/>
-              <a:t>3/22/2026</a:t>
+              <a:t>4/6/2026</a:t>
             </a:fld>
             <a:endParaRPr lang="en-US"/>
           </a:p>
@@ -480,7 +480,7 @@
           <a:p>
             <a:fld id="{5BCAD085-E8A6-8845-BD4E-CB4CCA059FC4}" type="datetimeFigureOut">
               <a:rPr lang="en-US" smtClean="0"/>
-              <a:t>3/22/2026</a:t>
+              <a:t>4/6/2026</a:t>
             </a:fld>
             <a:endParaRPr lang="en-US"/>
           </a:p>
@@ -658,7 +658,7 @@
           <a:p>
             <a:fld id="{5BCAD085-E8A6-8845-BD4E-CB4CCA059FC4}" type="datetimeFigureOut">
               <a:rPr lang="en-US" smtClean="0"/>
-              <a:t>3/22/2026</a:t>
+              <a:t>4/6/2026</a:t>
             </a:fld>
             <a:endParaRPr lang="en-US"/>
           </a:p>
@@ -826,7 +826,7 @@
           <a:p>
             <a:fld id="{5BCAD085-E8A6-8845-BD4E-CB4CCA059FC4}" type="datetimeFigureOut">
               <a:rPr lang="en-US" smtClean="0"/>
-              <a:t>3/22/2026</a:t>
+              <a:t>4/6/2026</a:t>
             </a:fld>
             <a:endParaRPr lang="en-US"/>
           </a:p>
@@ -1071,7 +1071,7 @@
           <a:p>
             <a:fld id="{5BCAD085-E8A6-8845-BD4E-CB4CCA059FC4}" type="datetimeFigureOut">
               <a:rPr lang="en-US" smtClean="0"/>
-              <a:t>3/22/2026</a:t>
+              <a:t>4/6/2026</a:t>
             </a:fld>
             <a:endParaRPr lang="en-US"/>
           </a:p>
@@ -1356,7 +1356,7 @@
           <a:p>
             <a:fld id="{5BCAD085-E8A6-8845-BD4E-CB4CCA059FC4}" type="datetimeFigureOut">
               <a:rPr lang="en-US" smtClean="0"/>
-              <a:t>3/22/2026</a:t>
+              <a:t>4/6/2026</a:t>
             </a:fld>
             <a:endParaRPr lang="en-US"/>
           </a:p>
@@ -1775,7 +1775,7 @@
           <a:p>
             <a:fld id="{5BCAD085-E8A6-8845-BD4E-CB4CCA059FC4}" type="datetimeFigureOut">
               <a:rPr lang="en-US" smtClean="0"/>
-              <a:t>3/22/2026</a:t>
+              <a:t>4/6/2026</a:t>
             </a:fld>
             <a:endParaRPr lang="en-US"/>
           </a:p>
@@ -1892,7 +1892,7 @@
           <a:p>
             <a:fld id="{5BCAD085-E8A6-8845-BD4E-CB4CCA059FC4}" type="datetimeFigureOut">
               <a:rPr lang="en-US" smtClean="0"/>
-              <a:t>3/22/2026</a:t>
+              <a:t>4/6/2026</a:t>
             </a:fld>
             <a:endParaRPr lang="en-US"/>
           </a:p>
@@ -1987,7 +1987,7 @@
           <a:p>
             <a:fld id="{5BCAD085-E8A6-8845-BD4E-CB4CCA059FC4}" type="datetimeFigureOut">
               <a:rPr lang="en-US" smtClean="0"/>
-              <a:t>3/22/2026</a:t>
+              <a:t>4/6/2026</a:t>
             </a:fld>
             <a:endParaRPr lang="en-US"/>
           </a:p>
@@ -2262,7 +2262,7 @@
           <a:p>
             <a:fld id="{5BCAD085-E8A6-8845-BD4E-CB4CCA059FC4}" type="datetimeFigureOut">
               <a:rPr lang="en-US" smtClean="0"/>
-              <a:t>3/22/2026</a:t>
+              <a:t>4/6/2026</a:t>
             </a:fld>
             <a:endParaRPr lang="en-US"/>
           </a:p>
@@ -2514,7 +2514,7 @@
           <a:p>
             <a:fld id="{5BCAD085-E8A6-8845-BD4E-CB4CCA059FC4}" type="datetimeFigureOut">
               <a:rPr lang="en-US" smtClean="0"/>
-              <a:t>3/22/2026</a:t>
+              <a:t>4/6/2026</a:t>
             </a:fld>
             <a:endParaRPr lang="en-US"/>
           </a:p>
@@ -2725,7 +2725,7 @@
           <a:p>
             <a:fld id="{5BCAD085-E8A6-8845-BD4E-CB4CCA059FC4}" type="datetimeFigureOut">
               <a:rPr lang="en-US" smtClean="0"/>
-              <a:t>3/22/2026</a:t>
+              <a:t>4/6/2026</a:t>
             </a:fld>
             <a:endParaRPr lang="en-US"/>
           </a:p>
@@ -3175,6 +3175,50 @@
           </a:extLst>
         </p:spPr>
       </p:pic>
+      <p:sp>
+        <p:nvSpPr>
+          <p:cNvPr id="4" name="TextBox 3">
+            <a:extLst>
+              <a:ext uri="{FF2B5EF4-FFF2-40B4-BE49-F238E27FC236}">
+                <a16:creationId xmlns:a16="http://schemas.microsoft.com/office/drawing/2014/main" id="{48ED4BB6-23E6-5800-3D31-632574A30A71}"/>
+              </a:ext>
+            </a:extLst>
+          </p:cNvPr>
+          <p:cNvSpPr txBox="1"/>
+          <p:nvPr/>
+        </p:nvSpPr>
+        <p:spPr>
+          <a:xfrm>
+            <a:off x="1175405" y="5483027"/>
+            <a:ext cx="7027523" cy="584775"/>
+          </a:xfrm>
+          <a:prstGeom prst="rect">
+            <a:avLst/>
+          </a:prstGeom>
+          <a:noFill/>
+        </p:spPr>
+        <p:txBody>
+          <a:bodyPr wrap="square">
+            <a:spAutoFit/>
+          </a:bodyPr>
+          <a:lstStyle/>
+          <a:p>
+            <a:r>
+              <a:rPr lang="en-US" sz="3200" b="1" dirty="0">
+                <a:solidFill>
+                  <a:schemeClr val="bg1"/>
+                </a:solidFill>
+              </a:rPr>
+              <a:t>Which One Should You Learn in 2026?</a:t>
+            </a:r>
+            <a:endParaRPr lang="en-IN" sz="3200" b="1" dirty="0">
+              <a:solidFill>
+                <a:schemeClr val="bg1"/>
+              </a:solidFill>
+            </a:endParaRPr>
+          </a:p>
+        </p:txBody>
+      </p:sp>
     </p:spTree>
   </p:cSld>
   <p:clrMapOvr>
@@ -3188,7 +3232,13 @@
   <p:cSld>
     <p:spTree>
       <p:nvGrpSpPr>
-        <p:cNvPr id="1" name=""/>
+        <p:cNvPr id="1" name="">
+          <a:extLst>
+            <a:ext uri="{FF2B5EF4-FFF2-40B4-BE49-F238E27FC236}">
+              <a16:creationId xmlns:a16="http://schemas.microsoft.com/office/drawing/2014/main" id="{F42DCE58-057A-7A49-6898-FCF30B59DD29}"/>
+            </a:ext>
+          </a:extLst>
+        </p:cNvPr>
         <p:cNvGrpSpPr/>
         <p:nvPr/>
       </p:nvGrpSpPr>
@@ -3205,7 +3255,7 @@
           <p:cNvPr id="2" name="Title 1">
             <a:extLst>
               <a:ext uri="{FF2B5EF4-FFF2-40B4-BE49-F238E27FC236}">
-                <a16:creationId xmlns:a16="http://schemas.microsoft.com/office/drawing/2014/main" id="{A1147624-BE50-2A53-CB6C-223931DA61B3}"/>
+                <a16:creationId xmlns:a16="http://schemas.microsoft.com/office/drawing/2014/main" id="{39B6F96F-EF5A-EAB4-1EAE-2852BB2C751D}"/>
               </a:ext>
             </a:extLst>
           </p:cNvPr>
@@ -3219,30 +3269,14 @@
         <p:spPr/>
         <p:txBody>
           <a:bodyPr>
-            <a:normAutofit fontScale="90000"/>
+            <a:normAutofit/>
           </a:bodyPr>
           <a:lstStyle/>
           <a:p>
             <a:r>
-              <a:rPr lang="en-US" dirty="0"/>
-              <a:t>🚫 </a:t>
-            </a:r>
-            <a:r>
-              <a:rPr lang="en-US" b="1" dirty="0"/>
-              <a:t>When NOT to Use </a:t>
-            </a:r>
-            <a:r>
-              <a:rPr lang="en-US" b="1" dirty="0" err="1"/>
-              <a:t>Quarkus</a:t>
-            </a:r>
-            <a:r>
-              <a:rPr lang="en-US" b="1" dirty="0"/>
-              <a:t>?</a:t>
-            </a:r>
-            <a:br>
-              <a:rPr lang="en-US" dirty="0"/>
-            </a:br>
-            <a:endParaRPr lang="en-IN" dirty="0"/>
+              <a:rPr lang="en-IN" dirty="0"/>
+              <a:t>Final Takeaway</a:t>
+            </a:r>
           </a:p>
         </p:txBody>
       </p:sp>
@@ -3251,7 +3285,7 @@
           <p:cNvPr id="3" name="Content Placeholder 2">
             <a:extLst>
               <a:ext uri="{FF2B5EF4-FFF2-40B4-BE49-F238E27FC236}">
-                <a16:creationId xmlns:a16="http://schemas.microsoft.com/office/drawing/2014/main" id="{BAE716DC-DC4B-0535-21F9-BE3BFD9A645D}"/>
+                <a16:creationId xmlns:a16="http://schemas.microsoft.com/office/drawing/2014/main" id="{CF9744B8-AF39-D99D-AC44-46A08E21ACD5}"/>
               </a:ext>
             </a:extLst>
           </p:cNvPr>
@@ -3265,7 +3299,7 @@
         <p:spPr/>
         <p:txBody>
           <a:bodyPr>
-            <a:normAutofit lnSpcReduction="10000"/>
+            <a:normAutofit/>
           </a:bodyPr>
           <a:lstStyle/>
           <a:p>
@@ -3273,163 +3307,34 @@
               <a:buNone/>
             </a:pPr>
             <a:r>
-              <a:rPr lang="en-US" sz="2000" dirty="0"/>
-              <a:t>🏢 </a:t>
-            </a:r>
-            <a:r>
-              <a:rPr lang="en-US" sz="2000" b="1" dirty="0"/>
-              <a:t>Traditional Monolithic Applications</a:t>
+              <a:rPr lang="en-IN" sz="2000" dirty="0"/>
+              <a:t>👉 Beginner → Spring Boot</a:t>
             </a:r>
             <a:br>
-              <a:rPr lang="en-US" sz="2000" dirty="0"/>
+              <a:rPr lang="en-IN" sz="2000" dirty="0"/>
             </a:br>
             <a:r>
-              <a:rPr lang="en-US" sz="2000" dirty="0"/>
-              <a:t>Spring Boot is often simpler &amp; more mature here</a:t>
-            </a:r>
-          </a:p>
-          <a:p>
-            <a:pPr marL="0" indent="0">
-              <a:buNone/>
-            </a:pPr>
-            <a:r>
-              <a:rPr lang="en-US" sz="2000" dirty="0"/>
-              <a:t>📚 </a:t>
-            </a:r>
-            <a:r>
-              <a:rPr lang="en-US" sz="2000" b="1" dirty="0"/>
-              <a:t>Need Huge Ecosystem Support</a:t>
+              <a:rPr lang="en-IN" sz="2000" dirty="0"/>
+              <a:t>👉 Cloud / Performance → </a:t>
+            </a:r>
+            <a:r>
+              <a:rPr lang="en-IN" sz="2000" dirty="0" err="1"/>
+              <a:t>Quarkus</a:t>
             </a:r>
             <a:br>
-              <a:rPr lang="en-US" sz="2000" dirty="0"/>
+              <a:rPr lang="en-IN" sz="2000" dirty="0"/>
             </a:br>
             <a:r>
-              <a:rPr lang="en-US" sz="2000" dirty="0"/>
-              <a:t>Spring has a much larger ecosystem &amp; integrations</a:t>
-            </a:r>
-          </a:p>
-          <a:p>
-            <a:pPr marL="0" indent="0">
-              <a:buNone/>
-            </a:pPr>
-            <a:r>
-              <a:rPr lang="en-US" sz="2000" dirty="0"/>
-              <a:t>👨‍💻 </a:t>
-            </a:r>
-            <a:r>
-              <a:rPr lang="en-US" sz="2000" b="1" dirty="0"/>
-              <a:t>Team is Already Deep into Spring</a:t>
-            </a:r>
-            <a:br>
-              <a:rPr lang="en-US" sz="2000" dirty="0"/>
-            </a:br>
-            <a:r>
-              <a:rPr lang="en-US" sz="2000" dirty="0"/>
-              <a:t>Switching may reduce productivity initially</a:t>
-            </a:r>
-          </a:p>
-          <a:p>
-            <a:pPr marL="0" indent="0">
-              <a:buNone/>
-            </a:pPr>
-            <a:r>
-              <a:rPr lang="en-US" sz="2000" dirty="0"/>
-              <a:t>🧩 </a:t>
-            </a:r>
-            <a:r>
-              <a:rPr lang="en-US" sz="2000" b="1" dirty="0"/>
-              <a:t>Simple CRUD Applications</a:t>
-            </a:r>
-            <a:br>
-              <a:rPr lang="en-US" sz="2000" dirty="0"/>
-            </a:br>
-            <a:r>
-              <a:rPr lang="en-US" sz="2000" dirty="0" err="1"/>
-              <a:t>Quarkus</a:t>
-            </a:r>
-            <a:r>
-              <a:rPr lang="en-US" sz="2000" dirty="0"/>
-              <a:t> might feel like over-optimization</a:t>
-            </a:r>
-          </a:p>
-          <a:p>
-            <a:pPr marL="0" indent="0">
-              <a:buNone/>
-            </a:pPr>
-            <a:r>
-              <a:rPr lang="en-US" sz="2000" dirty="0"/>
-              <a:t>⏳ </a:t>
-            </a:r>
-            <a:r>
-              <a:rPr lang="en-US" sz="2000" b="1" dirty="0"/>
-              <a:t>No Need for Fast Startup / Low Memory</a:t>
-            </a:r>
-            <a:br>
-              <a:rPr lang="en-US" sz="2000" dirty="0"/>
-            </a:br>
-            <a:r>
-              <a:rPr lang="en-US" sz="2000" dirty="0" err="1"/>
-              <a:t>Quarkus</a:t>
-            </a:r>
-            <a:r>
-              <a:rPr lang="en-US" sz="2000" dirty="0"/>
-              <a:t> strengths won’t add much value</a:t>
-            </a:r>
-          </a:p>
-          <a:p>
-            <a:pPr marL="0" indent="0">
-              <a:buNone/>
-            </a:pPr>
-            <a:r>
-              <a:rPr lang="en-US" sz="2000" dirty="0"/>
-              <a:t>🔌 </a:t>
-            </a:r>
-            <a:r>
-              <a:rPr lang="en-US" sz="2000" b="1" dirty="0"/>
-              <a:t>Heavy Dependency on Spring Features</a:t>
-            </a:r>
-            <a:br>
-              <a:rPr lang="en-US" sz="2000" dirty="0"/>
-            </a:br>
-            <a:r>
-              <a:rPr lang="en-US" sz="2000" dirty="0"/>
-              <a:t>Rewriting or adapting may take extra effort</a:t>
-            </a:r>
-          </a:p>
-          <a:p>
-            <a:pPr marL="0" indent="0">
-              <a:buNone/>
-            </a:pPr>
-            <a:r>
-              <a:rPr lang="en-US" sz="2000" dirty="0"/>
-              <a:t> 💡 </a:t>
-            </a:r>
-            <a:r>
-              <a:rPr lang="en-US" sz="2000" i="1" dirty="0"/>
-              <a:t>Choose </a:t>
-            </a:r>
-            <a:r>
-              <a:rPr lang="en-US" sz="2000" i="1" dirty="0" err="1"/>
-              <a:t>Quarkus</a:t>
-            </a:r>
-            <a:r>
-              <a:rPr lang="en-US" sz="2000" i="1" dirty="0"/>
-              <a:t> for performance &amp; cloud-native needs — not for every    	project.</a:t>
-            </a:r>
-            <a:endParaRPr lang="en-US" sz="2000" dirty="0"/>
-          </a:p>
-          <a:p>
-            <a:pPr marL="0" indent="0">
-              <a:buNone/>
-            </a:pPr>
-            <a:endParaRPr lang="en-IN" sz="2000" dirty="0"/>
+              <a:rPr lang="en-IN" sz="2000" dirty="0"/>
+              <a:t>👉 Best Developers → Learn Both</a:t>
+            </a:r>
           </a:p>
         </p:txBody>
       </p:sp>
     </p:spTree>
     <p:extLst>
       <p:ext uri="{BB962C8B-B14F-4D97-AF65-F5344CB8AC3E}">
-        <p14:creationId xmlns:p14="http://schemas.microsoft.com/office/powerpoint/2010/main" val="2141617547"/>
+        <p14:creationId xmlns:p14="http://schemas.microsoft.com/office/powerpoint/2010/main" val="1262858273"/>
       </p:ext>
     </p:extLst>
   </p:cSld>
@@ -3582,7 +3487,9 @@
         </p:nvSpPr>
         <p:spPr/>
         <p:txBody>
-          <a:bodyPr/>
+          <a:bodyPr>
+            <a:normAutofit/>
+          </a:bodyPr>
           <a:lstStyle/>
           <a:p>
             <a:pPr marL="514350" indent="-514350">
@@ -3590,8 +3497,8 @@
               <a:buAutoNum type="arabicPeriod"/>
             </a:pPr>
             <a:r>
-              <a:rPr lang="en-IN" dirty="0"/>
-              <a:t>Spring Boot Overview</a:t>
+              <a:rPr lang="en-US" dirty="0"/>
+              <a:t>Spring Boot</a:t>
             </a:r>
           </a:p>
           <a:p>
@@ -3600,13 +3507,10 @@
               <a:buAutoNum type="arabicPeriod"/>
             </a:pPr>
             <a:r>
-              <a:rPr lang="en-IN" dirty="0" err="1"/>
+              <a:rPr lang="en-US" dirty="0" err="1"/>
               <a:t>Quarkus</a:t>
             </a:r>
-            <a:r>
-              <a:rPr lang="en-IN" dirty="0"/>
-              <a:t> Overview</a:t>
-            </a:r>
+            <a:endParaRPr lang="en-US" dirty="0"/>
           </a:p>
           <a:p>
             <a:pPr marL="514350" indent="-514350">
@@ -3614,16 +3518,8 @@
               <a:buAutoNum type="arabicPeriod"/>
             </a:pPr>
             <a:r>
-              <a:rPr lang="en-IN" dirty="0"/>
-              <a:t>Key Differences (Spring Boot vs </a:t>
-            </a:r>
-            <a:r>
-              <a:rPr lang="en-IN" dirty="0" err="1"/>
-              <a:t>Quarkus</a:t>
-            </a:r>
-            <a:r>
-              <a:rPr lang="en-IN" dirty="0"/>
-              <a:t>)</a:t>
+              <a:rPr lang="en-US" dirty="0"/>
+              <a:t>Key Differences</a:t>
             </a:r>
           </a:p>
           <a:p>
@@ -3632,20 +3528,9 @@
               <a:buAutoNum type="arabicPeriod"/>
             </a:pPr>
             <a:r>
-              <a:rPr lang="en-IN" dirty="0"/>
-              <a:t>Live Coding Demo</a:t>
-            </a:r>
-          </a:p>
-          <a:p>
-            <a:pPr marL="514350" indent="-514350">
-              <a:buFont typeface="+mj-lt"/>
-              <a:buAutoNum type="arabicPeriod"/>
-            </a:pPr>
-            <a:r>
-              <a:rPr lang="en-IN" dirty="0"/>
+              <a:rPr lang="en-US" dirty="0"/>
               <a:t>When to Use What</a:t>
             </a:r>
-            <a:endParaRPr dirty="0"/>
           </a:p>
         </p:txBody>
       </p:sp>
@@ -3743,19 +3628,6 @@
             </a:pPr>
             <a:r>
               <a:rPr lang="en-US" sz="2000" dirty="0"/>
-              <a:t>⚡ Rapid Development (Less Configuration)</a:t>
-            </a:r>
-            <a:br>
-              <a:rPr lang="en-US" sz="2000" dirty="0"/>
-            </a:br>
-            <a:endParaRPr lang="en-US" sz="2000" dirty="0"/>
-          </a:p>
-          <a:p>
-            <a:pPr marL="0" indent="0">
-              <a:buNone/>
-            </a:pPr>
-            <a:r>
-              <a:rPr lang="en-US" sz="2000" dirty="0"/>
               <a:t>🧩 Auto Configuration Built-in</a:t>
             </a:r>
             <a:br>
@@ -3889,19 +3761,52 @@
             </a:pPr>
             <a:r>
               <a:rPr lang="en-IN" sz="2000" dirty="0"/>
-              <a:t>🔥 Kubernetes-Native Java Framework</a:t>
-            </a:r>
-          </a:p>
-          <a:p>
-            <a:pPr marL="0" indent="0">
-              <a:buNone/>
-            </a:pPr>
-            <a:br>
+              <a:t>⚡ Super Fast Startup </a:t>
+            </a:r>
+          </a:p>
+          <a:p>
+            <a:pPr marL="0" indent="0">
+              <a:buNone/>
+            </a:pPr>
+            <a:endParaRPr lang="en-IN" sz="2000" dirty="0"/>
+          </a:p>
+          <a:p>
+            <a:pPr marL="0" indent="0">
+              <a:buNone/>
+            </a:pPr>
+            <a:r>
               <a:rPr lang="en-IN" sz="2000" dirty="0"/>
-            </a:br>
+              <a:t>⚡ Low Memory Usage</a:t>
+            </a:r>
+          </a:p>
+          <a:p>
+            <a:pPr marL="0" indent="0">
+              <a:buNone/>
+            </a:pPr>
+            <a:endParaRPr lang="en-IN" sz="2000" dirty="0"/>
+          </a:p>
+          <a:p>
+            <a:pPr marL="0" indent="0">
+              <a:buNone/>
+            </a:pPr>
             <a:r>
               <a:rPr lang="en-IN" sz="2000" dirty="0"/>
-              <a:t>⚡ Super Fast Startup &amp; Low Memory Usage</a:t>
+              <a:t>☁️ Built for Cloud &amp; Kubernetes</a:t>
+            </a:r>
+          </a:p>
+          <a:p>
+            <a:pPr marL="0" indent="0">
+              <a:buNone/>
+            </a:pPr>
+            <a:endParaRPr lang="en-IN" sz="2000" dirty="0"/>
+          </a:p>
+          <a:p>
+            <a:pPr marL="0" indent="0">
+              <a:buNone/>
+            </a:pPr>
+            <a:r>
+              <a:rPr lang="en-IN" sz="2000" dirty="0"/>
+              <a:t>🧩 Reactive &amp; Non-Blocking by Design</a:t>
             </a:r>
             <a:br>
               <a:rPr lang="en-IN" sz="2000" dirty="0"/>
@@ -3914,7 +3819,7 @@
             </a:pPr>
             <a:r>
               <a:rPr lang="en-IN" sz="2000" dirty="0"/>
-              <a:t>☁️ Built for Cloud &amp; Microservices</a:t>
+              <a:t>🐳 Perfect for Containers &amp; Serverless</a:t>
             </a:r>
             <a:br>
               <a:rPr lang="en-IN" sz="2000" dirty="0"/>
@@ -3925,45 +3830,6 @@
             <a:pPr marL="0" indent="0">
               <a:buNone/>
             </a:pPr>
-            <a:r>
-              <a:rPr lang="en-IN" sz="2000" dirty="0"/>
-              <a:t>🧩 Reactive &amp; Non-Blocking by Design</a:t>
-            </a:r>
-            <a:br>
-              <a:rPr lang="en-IN" sz="2000" dirty="0"/>
-            </a:br>
-            <a:endParaRPr lang="en-IN" sz="2000" dirty="0"/>
-          </a:p>
-          <a:p>
-            <a:pPr marL="0" indent="0">
-              <a:buNone/>
-            </a:pPr>
-            <a:r>
-              <a:rPr lang="en-IN" sz="2000" dirty="0"/>
-              <a:t>🐳 Perfect for Containers &amp; Serverless</a:t>
-            </a:r>
-            <a:br>
-              <a:rPr lang="en-IN" sz="2000" dirty="0"/>
-            </a:br>
-            <a:endParaRPr lang="en-IN" sz="2000" dirty="0"/>
-          </a:p>
-          <a:p>
-            <a:pPr marL="0" indent="0">
-              <a:buNone/>
-            </a:pPr>
-            <a:r>
-              <a:rPr lang="en-IN" sz="2000" dirty="0"/>
-              <a:t>🚀 Developer Joy (Live Reload + Fast Dev Mode)</a:t>
-            </a:r>
-          </a:p>
-          <a:p>
-            <a:pPr marL="0" indent="0">
-              <a:buNone/>
-            </a:pPr>
-            <a:r>
-              <a:rPr lang="en-IN" sz="2000" dirty="0"/>
-              <a:t>	</a:t>
-            </a:r>
             <a:r>
               <a:rPr lang="en-US" sz="2000" dirty="0"/>
               <a:t>💡 </a:t>
@@ -4013,11 +3879,14 @@
         </p:nvSpPr>
         <p:spPr/>
         <p:txBody>
-          <a:bodyPr/>
-          <a:lstStyle/>
-          <a:p>
-            <a:r>
-              <a:t>Simple Analogy</a:t>
+          <a:bodyPr>
+            <a:normAutofit/>
+          </a:bodyPr>
+          <a:lstStyle/>
+          <a:p>
+            <a:r>
+              <a:rPr sz="6600" b="1" dirty="0"/>
+              <a:t>Analogy</a:t>
             </a:r>
           </a:p>
         </p:txBody>
@@ -4034,23 +3903,35 @@
         </p:nvSpPr>
         <p:spPr/>
         <p:txBody>
-          <a:bodyPr/>
-          <a:lstStyle/>
-          <a:p>
-            <a:r>
-              <a:rPr dirty="0"/>
-              <a:t>Spring Boot = Truck (powerful but heavy)</a:t>
-            </a:r>
-          </a:p>
-          <a:p>
-            <a:r>
-              <a:rPr dirty="0" err="1"/>
+          <a:bodyPr>
+            <a:normAutofit/>
+          </a:bodyPr>
+          <a:lstStyle/>
+          <a:p>
+            <a:pPr marL="0" indent="0">
+              <a:buNone/>
+            </a:pPr>
+            <a:r>
+              <a:rPr lang="en-IN" sz="4800" b="1" dirty="0"/>
+              <a:t>Spring Boot = 🚛 Truck</a:t>
+            </a:r>
+          </a:p>
+          <a:p>
+            <a:pPr marL="0" indent="0">
+              <a:buNone/>
+            </a:pPr>
+            <a:br>
+              <a:rPr lang="en-IN" sz="4800" dirty="0"/>
+            </a:br>
+            <a:r>
+              <a:rPr lang="en-IN" sz="4800" b="1" dirty="0" err="1"/>
               <a:t>Quarkus</a:t>
             </a:r>
             <a:r>
-              <a:rPr dirty="0"/>
-              <a:t> = Bike (fast &amp; lightweight)</a:t>
-            </a:r>
+              <a:rPr lang="en-IN" sz="4800" b="1" dirty="0"/>
+              <a:t> = 🏍️ Bike</a:t>
+            </a:r>
+            <a:endParaRPr sz="4800" dirty="0"/>
           </a:p>
         </p:txBody>
       </p:sp>
@@ -4067,7 +3948,13 @@
   <p:cSld>
     <p:spTree>
       <p:nvGrpSpPr>
-        <p:cNvPr id="1" name=""/>
+        <p:cNvPr id="1" name="">
+          <a:extLst>
+            <a:ext uri="{FF2B5EF4-FFF2-40B4-BE49-F238E27FC236}">
+              <a16:creationId xmlns:a16="http://schemas.microsoft.com/office/drawing/2014/main" id="{AD868E5C-3EB6-9729-4675-46E459455619}"/>
+            </a:ext>
+          </a:extLst>
+        </p:cNvPr>
         <p:cNvGrpSpPr/>
         <p:nvPr/>
       </p:nvGrpSpPr>
@@ -4081,862 +3968,148 @@
       </p:grpSpPr>
       <p:sp>
         <p:nvSpPr>
-          <p:cNvPr id="2" name="Title 1"/>
-          <p:cNvSpPr>
-            <a:spLocks noGrp="1"/>
-          </p:cNvSpPr>
-          <p:nvPr>
-            <p:ph type="title"/>
-          </p:nvPr>
-        </p:nvSpPr>
-        <p:spPr/>
-        <p:txBody>
-          <a:bodyPr/>
-          <a:lstStyle/>
-          <a:p>
-            <a:r>
-              <a:t>Key Differences</a:t>
-            </a:r>
-          </a:p>
-        </p:txBody>
-      </p:sp>
-      <p:graphicFrame>
-        <p:nvGraphicFramePr>
-          <p:cNvPr id="4" name="Content Placeholder 3">
+          <p:cNvPr id="2" name="Title 1">
             <a:extLst>
               <a:ext uri="{FF2B5EF4-FFF2-40B4-BE49-F238E27FC236}">
-                <a16:creationId xmlns:a16="http://schemas.microsoft.com/office/drawing/2014/main" id="{51C7E8BA-D449-62F7-C347-9E3B419B0C3A}"/>
+                <a16:creationId xmlns:a16="http://schemas.microsoft.com/office/drawing/2014/main" id="{89FDA6FC-160F-E763-BA2C-06F0C1A48749}"/>
               </a:ext>
             </a:extLst>
           </p:cNvPr>
-          <p:cNvGraphicFramePr>
-            <a:graphicFrameLocks noGrp="1"/>
-          </p:cNvGraphicFramePr>
+          <p:cNvSpPr>
+            <a:spLocks noGrp="1"/>
+          </p:cNvSpPr>
+          <p:nvPr>
+            <p:ph type="title"/>
+          </p:nvPr>
+        </p:nvSpPr>
+        <p:spPr/>
+        <p:txBody>
+          <a:bodyPr>
+            <a:normAutofit/>
+          </a:bodyPr>
+          <a:lstStyle/>
+          <a:p>
+            <a:r>
+              <a:rPr lang="en-IN" b="1" dirty="0"/>
+              <a:t>	Key Difference</a:t>
+            </a:r>
+          </a:p>
+        </p:txBody>
+      </p:sp>
+      <p:sp>
+        <p:nvSpPr>
+          <p:cNvPr id="3" name="Content Placeholder 2">
+            <a:extLst>
+              <a:ext uri="{FF2B5EF4-FFF2-40B4-BE49-F238E27FC236}">
+                <a16:creationId xmlns:a16="http://schemas.microsoft.com/office/drawing/2014/main" id="{D230222B-5168-D0C8-4E03-58B69C21765F}"/>
+              </a:ext>
+            </a:extLst>
+          </p:cNvPr>
+          <p:cNvSpPr>
+            <a:spLocks noGrp="1"/>
+          </p:cNvSpPr>
           <p:nvPr>
             <p:ph idx="1"/>
-            <p:extLst>
-              <p:ext uri="{D42A27DB-BD31-4B8C-83A1-F6EECF244321}">
-                <p14:modId xmlns:p14="http://schemas.microsoft.com/office/powerpoint/2010/main" val="3972435882"/>
-              </p:ext>
-            </p:extLst>
-          </p:nvPr>
-        </p:nvGraphicFramePr>
-        <p:xfrm>
-          <a:off x="457199" y="1417638"/>
-          <a:ext cx="8337480" cy="4849600"/>
-        </p:xfrm>
-        <a:graphic>
-          <a:graphicData uri="http://schemas.openxmlformats.org/drawingml/2006/table">
-            <a:tbl>
-              <a:tblPr/>
-              <a:tblGrid>
-                <a:gridCol w="2779160">
-                  <a:extLst>
-                    <a:ext uri="{9D8B030D-6E8A-4147-A177-3AD203B41FA5}">
-                      <a16:colId xmlns:a16="http://schemas.microsoft.com/office/drawing/2014/main" val="4206472447"/>
-                    </a:ext>
-                  </a:extLst>
-                </a:gridCol>
-                <a:gridCol w="2779160">
-                  <a:extLst>
-                    <a:ext uri="{9D8B030D-6E8A-4147-A177-3AD203B41FA5}">
-                      <a16:colId xmlns:a16="http://schemas.microsoft.com/office/drawing/2014/main" val="2646333136"/>
-                    </a:ext>
-                  </a:extLst>
-                </a:gridCol>
-                <a:gridCol w="2779160">
-                  <a:extLst>
-                    <a:ext uri="{9D8B030D-6E8A-4147-A177-3AD203B41FA5}">
-                      <a16:colId xmlns:a16="http://schemas.microsoft.com/office/drawing/2014/main" val="3514639296"/>
-                    </a:ext>
-                  </a:extLst>
-                </a:gridCol>
-              </a:tblGrid>
-              <a:tr h="606200">
-                <a:tc>
-                  <a:txBody>
-                    <a:bodyPr/>
-                    <a:lstStyle/>
-                    <a:p>
-                      <a:pPr>
-                        <a:buNone/>
-                      </a:pPr>
-                      <a:r>
-                        <a:rPr lang="en-IN" b="1" dirty="0">
-                          <a:highlight>
-                            <a:srgbClr val="FFFF00"/>
-                          </a:highlight>
-                        </a:rPr>
-                        <a:t>Feature</a:t>
-                      </a:r>
-                    </a:p>
-                  </a:txBody>
-                  <a:tcPr anchor="ctr">
-                    <a:lnL>
-                      <a:noFill/>
-                    </a:lnL>
-                    <a:lnR>
-                      <a:noFill/>
-                    </a:lnR>
-                    <a:lnT>
-                      <a:noFill/>
-                    </a:lnT>
-                    <a:lnB>
-                      <a:noFill/>
-                    </a:lnB>
-                    <a:noFill/>
-                  </a:tcPr>
-                </a:tc>
-                <a:tc>
-                  <a:txBody>
-                    <a:bodyPr/>
-                    <a:lstStyle/>
-                    <a:p>
-                      <a:pPr>
-                        <a:buNone/>
-                      </a:pPr>
-                      <a:r>
-                        <a:rPr lang="en-IN" b="1"/>
-                        <a:t>Quarkus 🚀</a:t>
-                      </a:r>
-                    </a:p>
-                  </a:txBody>
-                  <a:tcPr anchor="ctr">
-                    <a:lnL>
-                      <a:noFill/>
-                    </a:lnL>
-                    <a:lnR>
-                      <a:noFill/>
-                    </a:lnR>
-                    <a:lnT>
-                      <a:noFill/>
-                    </a:lnT>
-                    <a:lnB>
-                      <a:noFill/>
-                    </a:lnB>
-                    <a:noFill/>
-                  </a:tcPr>
-                </a:tc>
-                <a:tc>
-                  <a:txBody>
-                    <a:bodyPr/>
-                    <a:lstStyle/>
-                    <a:p>
-                      <a:pPr>
-                        <a:buNone/>
-                      </a:pPr>
-                      <a:r>
-                        <a:rPr lang="en-IN" b="1" dirty="0"/>
-                        <a:t>Spring Boot 🌱</a:t>
-                      </a:r>
-                    </a:p>
-                  </a:txBody>
-                  <a:tcPr anchor="ctr">
-                    <a:lnL>
-                      <a:noFill/>
-                    </a:lnL>
-                    <a:lnR>
-                      <a:noFill/>
-                    </a:lnR>
-                    <a:lnT>
-                      <a:noFill/>
-                    </a:lnT>
-                    <a:lnB>
-                      <a:noFill/>
-                    </a:lnB>
-                    <a:noFill/>
-                  </a:tcPr>
-                </a:tc>
-                <a:extLst>
-                  <a:ext uri="{0D108BD9-81ED-4DB2-BD59-A6C34878D82A}">
-                    <a16:rowId xmlns:a16="http://schemas.microsoft.com/office/drawing/2014/main" val="1935604331"/>
-                  </a:ext>
-                </a:extLst>
-              </a:tr>
-              <a:tr h="606200">
-                <a:tc>
-                  <a:txBody>
-                    <a:bodyPr/>
-                    <a:lstStyle/>
-                    <a:p>
-                      <a:pPr>
-                        <a:buNone/>
-                      </a:pPr>
-                      <a:r>
-                        <a:rPr lang="en-IN" sz="1400" dirty="0"/>
-                        <a:t>What is it?</a:t>
-                      </a:r>
-                    </a:p>
-                  </a:txBody>
-                  <a:tcPr anchor="ctr">
-                    <a:lnL>
-                      <a:noFill/>
-                    </a:lnL>
-                    <a:lnR>
-                      <a:noFill/>
-                    </a:lnR>
-                    <a:lnT>
-                      <a:noFill/>
-                    </a:lnT>
-                    <a:lnB>
-                      <a:noFill/>
-                    </a:lnB>
-                    <a:noFill/>
-                  </a:tcPr>
-                </a:tc>
-                <a:tc>
-                  <a:txBody>
-                    <a:bodyPr/>
-                    <a:lstStyle/>
-                    <a:p>
-                      <a:pPr>
-                        <a:buNone/>
-                      </a:pPr>
-                      <a:r>
-                        <a:rPr lang="en-IN" sz="1400"/>
-                        <a:t>Modern Java framework</a:t>
-                      </a:r>
-                    </a:p>
-                  </a:txBody>
-                  <a:tcPr anchor="ctr">
-                    <a:lnL>
-                      <a:noFill/>
-                    </a:lnL>
-                    <a:lnR>
-                      <a:noFill/>
-                    </a:lnR>
-                    <a:lnT>
-                      <a:noFill/>
-                    </a:lnT>
-                    <a:lnB>
-                      <a:noFill/>
-                    </a:lnB>
-                    <a:noFill/>
-                  </a:tcPr>
-                </a:tc>
-                <a:tc>
-                  <a:txBody>
-                    <a:bodyPr/>
-                    <a:lstStyle/>
-                    <a:p>
-                      <a:pPr>
-                        <a:buNone/>
-                      </a:pPr>
-                      <a:r>
-                        <a:rPr lang="en-IN" sz="1400"/>
-                        <a:t>Popular Java framework</a:t>
-                      </a:r>
-                    </a:p>
-                  </a:txBody>
-                  <a:tcPr anchor="ctr">
-                    <a:lnL>
-                      <a:noFill/>
-                    </a:lnL>
-                    <a:lnR>
-                      <a:noFill/>
-                    </a:lnR>
-                    <a:lnT>
-                      <a:noFill/>
-                    </a:lnT>
-                    <a:lnB>
-                      <a:noFill/>
-                    </a:lnB>
-                    <a:noFill/>
-                  </a:tcPr>
-                </a:tc>
-                <a:extLst>
-                  <a:ext uri="{0D108BD9-81ED-4DB2-BD59-A6C34878D82A}">
-                    <a16:rowId xmlns:a16="http://schemas.microsoft.com/office/drawing/2014/main" val="3979012763"/>
-                  </a:ext>
-                </a:extLst>
-              </a:tr>
-              <a:tr h="606200">
-                <a:tc>
-                  <a:txBody>
-                    <a:bodyPr/>
-                    <a:lstStyle/>
-                    <a:p>
-                      <a:pPr>
-                        <a:buNone/>
-                      </a:pPr>
-                      <a:r>
-                        <a:rPr lang="en-IN" sz="1400"/>
-                        <a:t>Startup Time</a:t>
-                      </a:r>
-                    </a:p>
-                  </a:txBody>
-                  <a:tcPr anchor="ctr">
-                    <a:lnL>
-                      <a:noFill/>
-                    </a:lnL>
-                    <a:lnR>
-                      <a:noFill/>
-                    </a:lnR>
-                    <a:lnT>
-                      <a:noFill/>
-                    </a:lnT>
-                    <a:lnB>
-                      <a:noFill/>
-                    </a:lnB>
-                    <a:noFill/>
-                  </a:tcPr>
-                </a:tc>
-                <a:tc>
-                  <a:txBody>
-                    <a:bodyPr/>
-                    <a:lstStyle/>
-                    <a:p>
-                      <a:pPr>
-                        <a:buNone/>
-                      </a:pPr>
-                      <a:r>
-                        <a:rPr lang="en-IN" sz="1400" dirty="0"/>
-                        <a:t>Very fast ⚡</a:t>
-                      </a:r>
-                    </a:p>
-                  </a:txBody>
-                  <a:tcPr anchor="ctr">
-                    <a:lnL>
-                      <a:noFill/>
-                    </a:lnL>
-                    <a:lnR>
-                      <a:noFill/>
-                    </a:lnR>
-                    <a:lnT>
-                      <a:noFill/>
-                    </a:lnT>
-                    <a:lnB>
-                      <a:noFill/>
-                    </a:lnB>
-                    <a:noFill/>
-                  </a:tcPr>
-                </a:tc>
-                <a:tc>
-                  <a:txBody>
-                    <a:bodyPr/>
-                    <a:lstStyle/>
-                    <a:p>
-                      <a:pPr>
-                        <a:buNone/>
-                      </a:pPr>
-                      <a:r>
-                        <a:rPr lang="en-IN" sz="1400" dirty="0"/>
-                        <a:t>Normal 🐢</a:t>
-                      </a:r>
-                    </a:p>
-                  </a:txBody>
-                  <a:tcPr anchor="ctr">
-                    <a:lnL>
-                      <a:noFill/>
-                    </a:lnL>
-                    <a:lnR>
-                      <a:noFill/>
-                    </a:lnR>
-                    <a:lnT>
-                      <a:noFill/>
-                    </a:lnT>
-                    <a:lnB>
-                      <a:noFill/>
-                    </a:lnB>
-                    <a:noFill/>
-                  </a:tcPr>
-                </a:tc>
-                <a:extLst>
-                  <a:ext uri="{0D108BD9-81ED-4DB2-BD59-A6C34878D82A}">
-                    <a16:rowId xmlns:a16="http://schemas.microsoft.com/office/drawing/2014/main" val="2981751356"/>
-                  </a:ext>
-                </a:extLst>
-              </a:tr>
-              <a:tr h="606200">
-                <a:tc>
-                  <a:txBody>
-                    <a:bodyPr/>
-                    <a:lstStyle/>
-                    <a:p>
-                      <a:pPr>
-                        <a:buNone/>
-                      </a:pPr>
-                      <a:r>
-                        <a:rPr lang="en-IN" sz="1400"/>
-                        <a:t>Memory Usage</a:t>
-                      </a:r>
-                    </a:p>
-                  </a:txBody>
-                  <a:tcPr anchor="ctr">
-                    <a:lnL>
-                      <a:noFill/>
-                    </a:lnL>
-                    <a:lnR>
-                      <a:noFill/>
-                    </a:lnR>
-                    <a:lnT>
-                      <a:noFill/>
-                    </a:lnT>
-                    <a:lnB>
-                      <a:noFill/>
-                    </a:lnB>
-                    <a:noFill/>
-                  </a:tcPr>
-                </a:tc>
-                <a:tc>
-                  <a:txBody>
-                    <a:bodyPr/>
-                    <a:lstStyle/>
-                    <a:p>
-                      <a:pPr>
-                        <a:buNone/>
-                      </a:pPr>
-                      <a:r>
-                        <a:rPr lang="en-IN" sz="1400" dirty="0"/>
-                        <a:t>Less</a:t>
-                      </a:r>
-                    </a:p>
-                  </a:txBody>
-                  <a:tcPr anchor="ctr">
-                    <a:lnL>
-                      <a:noFill/>
-                    </a:lnL>
-                    <a:lnR>
-                      <a:noFill/>
-                    </a:lnR>
-                    <a:lnT>
-                      <a:noFill/>
-                    </a:lnT>
-                    <a:lnB>
-                      <a:noFill/>
-                    </a:lnB>
-                    <a:noFill/>
-                  </a:tcPr>
-                </a:tc>
-                <a:tc>
-                  <a:txBody>
-                    <a:bodyPr/>
-                    <a:lstStyle/>
-                    <a:p>
-                      <a:pPr>
-                        <a:buNone/>
-                      </a:pPr>
-                      <a:r>
-                        <a:rPr lang="en-IN" sz="1400"/>
-                        <a:t>More</a:t>
-                      </a:r>
-                    </a:p>
-                  </a:txBody>
-                  <a:tcPr anchor="ctr">
-                    <a:lnL>
-                      <a:noFill/>
-                    </a:lnL>
-                    <a:lnR>
-                      <a:noFill/>
-                    </a:lnR>
-                    <a:lnT>
-                      <a:noFill/>
-                    </a:lnT>
-                    <a:lnB>
-                      <a:noFill/>
-                    </a:lnB>
-                    <a:noFill/>
-                  </a:tcPr>
-                </a:tc>
-                <a:extLst>
-                  <a:ext uri="{0D108BD9-81ED-4DB2-BD59-A6C34878D82A}">
-                    <a16:rowId xmlns:a16="http://schemas.microsoft.com/office/drawing/2014/main" val="1724732603"/>
-                  </a:ext>
-                </a:extLst>
-              </a:tr>
-              <a:tr h="606200">
-                <a:tc>
-                  <a:txBody>
-                    <a:bodyPr/>
-                    <a:lstStyle/>
-                    <a:p>
-                      <a:pPr>
-                        <a:buNone/>
-                      </a:pPr>
-                      <a:r>
-                        <a:rPr lang="en-IN" sz="1400"/>
-                        <a:t>Easy to Learn</a:t>
-                      </a:r>
-                    </a:p>
-                  </a:txBody>
-                  <a:tcPr anchor="ctr">
-                    <a:lnL>
-                      <a:noFill/>
-                    </a:lnL>
-                    <a:lnR>
-                      <a:noFill/>
-                    </a:lnR>
-                    <a:lnT>
-                      <a:noFill/>
-                    </a:lnT>
-                    <a:lnB>
-                      <a:noFill/>
-                    </a:lnB>
-                    <a:noFill/>
-                  </a:tcPr>
-                </a:tc>
-                <a:tc>
-                  <a:txBody>
-                    <a:bodyPr/>
-                    <a:lstStyle/>
-                    <a:p>
-                      <a:pPr>
-                        <a:buNone/>
-                      </a:pPr>
-                      <a:r>
-                        <a:rPr lang="en-IN" sz="1400"/>
-                        <a:t>Medium</a:t>
-                      </a:r>
-                    </a:p>
-                  </a:txBody>
-                  <a:tcPr anchor="ctr">
-                    <a:lnL>
-                      <a:noFill/>
-                    </a:lnL>
-                    <a:lnR>
-                      <a:noFill/>
-                    </a:lnR>
-                    <a:lnT>
-                      <a:noFill/>
-                    </a:lnT>
-                    <a:lnB>
-                      <a:noFill/>
-                    </a:lnB>
-                    <a:noFill/>
-                  </a:tcPr>
-                </a:tc>
-                <a:tc>
-                  <a:txBody>
-                    <a:bodyPr/>
-                    <a:lstStyle/>
-                    <a:p>
-                      <a:pPr>
-                        <a:buNone/>
-                      </a:pPr>
-                      <a:r>
-                        <a:rPr lang="en-IN" sz="1400" dirty="0"/>
-                        <a:t>Very Easy</a:t>
-                      </a:r>
-                    </a:p>
-                  </a:txBody>
-                  <a:tcPr anchor="ctr">
-                    <a:lnL>
-                      <a:noFill/>
-                    </a:lnL>
-                    <a:lnR>
-                      <a:noFill/>
-                    </a:lnR>
-                    <a:lnT>
-                      <a:noFill/>
-                    </a:lnT>
-                    <a:lnB>
-                      <a:noFill/>
-                    </a:lnB>
-                    <a:noFill/>
-                  </a:tcPr>
-                </a:tc>
-                <a:extLst>
-                  <a:ext uri="{0D108BD9-81ED-4DB2-BD59-A6C34878D82A}">
-                    <a16:rowId xmlns:a16="http://schemas.microsoft.com/office/drawing/2014/main" val="247150494"/>
-                  </a:ext>
-                </a:extLst>
-              </a:tr>
-              <a:tr h="606200">
-                <a:tc>
-                  <a:txBody>
-                    <a:bodyPr/>
-                    <a:lstStyle/>
-                    <a:p>
-                      <a:pPr>
-                        <a:buNone/>
-                      </a:pPr>
-                      <a:r>
-                        <a:rPr lang="en-IN" sz="1400"/>
-                        <a:t>Community</a:t>
-                      </a:r>
-                    </a:p>
-                  </a:txBody>
-                  <a:tcPr anchor="ctr">
-                    <a:lnL>
-                      <a:noFill/>
-                    </a:lnL>
-                    <a:lnR>
-                      <a:noFill/>
-                    </a:lnR>
-                    <a:lnT>
-                      <a:noFill/>
-                    </a:lnT>
-                    <a:lnB>
-                      <a:noFill/>
-                    </a:lnB>
-                    <a:noFill/>
-                  </a:tcPr>
-                </a:tc>
-                <a:tc>
-                  <a:txBody>
-                    <a:bodyPr/>
-                    <a:lstStyle/>
-                    <a:p>
-                      <a:pPr>
-                        <a:buNone/>
-                      </a:pPr>
-                      <a:r>
-                        <a:rPr lang="en-IN" sz="1400"/>
-                        <a:t>Small</a:t>
-                      </a:r>
-                    </a:p>
-                  </a:txBody>
-                  <a:tcPr anchor="ctr">
-                    <a:lnL>
-                      <a:noFill/>
-                    </a:lnL>
-                    <a:lnR>
-                      <a:noFill/>
-                    </a:lnR>
-                    <a:lnT>
-                      <a:noFill/>
-                    </a:lnT>
-                    <a:lnB>
-                      <a:noFill/>
-                    </a:lnB>
-                    <a:noFill/>
-                  </a:tcPr>
-                </a:tc>
-                <a:tc>
-                  <a:txBody>
-                    <a:bodyPr/>
-                    <a:lstStyle/>
-                    <a:p>
-                      <a:pPr>
-                        <a:buNone/>
-                      </a:pPr>
-                      <a:r>
-                        <a:rPr lang="en-IN" sz="1400"/>
-                        <a:t>Very Big</a:t>
-                      </a:r>
-                    </a:p>
-                  </a:txBody>
-                  <a:tcPr anchor="ctr">
-                    <a:lnL>
-                      <a:noFill/>
-                    </a:lnL>
-                    <a:lnR>
-                      <a:noFill/>
-                    </a:lnR>
-                    <a:lnT>
-                      <a:noFill/>
-                    </a:lnT>
-                    <a:lnB>
-                      <a:noFill/>
-                    </a:lnB>
-                    <a:noFill/>
-                  </a:tcPr>
-                </a:tc>
-                <a:extLst>
-                  <a:ext uri="{0D108BD9-81ED-4DB2-BD59-A6C34878D82A}">
-                    <a16:rowId xmlns:a16="http://schemas.microsoft.com/office/drawing/2014/main" val="3055009550"/>
-                  </a:ext>
-                </a:extLst>
-              </a:tr>
-              <a:tr h="606200">
-                <a:tc>
-                  <a:txBody>
-                    <a:bodyPr/>
-                    <a:lstStyle/>
-                    <a:p>
-                      <a:pPr>
-                        <a:buNone/>
-                      </a:pPr>
-                      <a:r>
-                        <a:rPr lang="en-IN" sz="1400"/>
-                        <a:t>Best For</a:t>
-                      </a:r>
-                    </a:p>
-                  </a:txBody>
-                  <a:tcPr anchor="ctr">
-                    <a:lnL>
-                      <a:noFill/>
-                    </a:lnL>
-                    <a:lnR>
-                      <a:noFill/>
-                    </a:lnR>
-                    <a:lnT>
-                      <a:noFill/>
-                    </a:lnT>
-                    <a:lnB>
-                      <a:noFill/>
-                    </a:lnB>
-                    <a:noFill/>
-                  </a:tcPr>
-                </a:tc>
-                <a:tc>
-                  <a:txBody>
-                    <a:bodyPr/>
-                    <a:lstStyle/>
-                    <a:p>
-                      <a:pPr>
-                        <a:buNone/>
-                      </a:pPr>
-                      <a:r>
-                        <a:rPr lang="en-IN" sz="1400" dirty="0"/>
-                        <a:t>Cloud &amp; microservices</a:t>
-                      </a:r>
-                    </a:p>
-                  </a:txBody>
-                  <a:tcPr anchor="ctr">
-                    <a:lnL>
-                      <a:noFill/>
-                    </a:lnL>
-                    <a:lnR>
-                      <a:noFill/>
-                    </a:lnR>
-                    <a:lnT>
-                      <a:noFill/>
-                    </a:lnT>
-                    <a:lnB>
-                      <a:noFill/>
-                    </a:lnB>
-                    <a:noFill/>
-                  </a:tcPr>
-                </a:tc>
-                <a:tc>
-                  <a:txBody>
-                    <a:bodyPr/>
-                    <a:lstStyle/>
-                    <a:p>
-                      <a:pPr>
-                        <a:buNone/>
-                      </a:pPr>
-                      <a:r>
-                        <a:rPr lang="en-IN" sz="1400"/>
-                        <a:t>All types of apps</a:t>
-                      </a:r>
-                    </a:p>
-                  </a:txBody>
-                  <a:tcPr anchor="ctr">
-                    <a:lnL>
-                      <a:noFill/>
-                    </a:lnL>
-                    <a:lnR>
-                      <a:noFill/>
-                    </a:lnR>
-                    <a:lnT>
-                      <a:noFill/>
-                    </a:lnT>
-                    <a:lnB>
-                      <a:noFill/>
-                    </a:lnB>
-                    <a:noFill/>
-                  </a:tcPr>
-                </a:tc>
-                <a:extLst>
-                  <a:ext uri="{0D108BD9-81ED-4DB2-BD59-A6C34878D82A}">
-                    <a16:rowId xmlns:a16="http://schemas.microsoft.com/office/drawing/2014/main" val="3377593761"/>
-                  </a:ext>
-                </a:extLst>
-              </a:tr>
-              <a:tr h="606200">
-                <a:tc>
-                  <a:txBody>
-                    <a:bodyPr/>
-                    <a:lstStyle/>
-                    <a:p>
-                      <a:pPr>
-                        <a:buNone/>
-                      </a:pPr>
-                      <a:r>
-                        <a:rPr lang="en-IN" sz="1400"/>
-                        <a:t>Industry Use</a:t>
-                      </a:r>
-                    </a:p>
-                  </a:txBody>
-                  <a:tcPr anchor="ctr">
-                    <a:lnL>
-                      <a:noFill/>
-                    </a:lnL>
-                    <a:lnR>
-                      <a:noFill/>
-                    </a:lnR>
-                    <a:lnT>
-                      <a:noFill/>
-                    </a:lnT>
-                    <a:lnB>
-                      <a:noFill/>
-                    </a:lnB>
-                    <a:noFill/>
-                  </a:tcPr>
-                </a:tc>
-                <a:tc>
-                  <a:txBody>
-                    <a:bodyPr/>
-                    <a:lstStyle/>
-                    <a:p>
-                      <a:pPr>
-                        <a:buNone/>
-                      </a:pPr>
-                      <a:r>
-                        <a:rPr lang="en-IN" sz="1400"/>
-                        <a:t>Growing</a:t>
-                      </a:r>
-                    </a:p>
-                  </a:txBody>
-                  <a:tcPr anchor="ctr">
-                    <a:lnL>
-                      <a:noFill/>
-                    </a:lnL>
-                    <a:lnR>
-                      <a:noFill/>
-                    </a:lnR>
-                    <a:lnT>
-                      <a:noFill/>
-                    </a:lnT>
-                    <a:lnB>
-                      <a:noFill/>
-                    </a:lnB>
-                    <a:noFill/>
-                  </a:tcPr>
-                </a:tc>
-                <a:tc>
-                  <a:txBody>
-                    <a:bodyPr/>
-                    <a:lstStyle/>
-                    <a:p>
-                      <a:pPr>
-                        <a:buNone/>
-                      </a:pPr>
-                      <a:r>
-                        <a:rPr lang="en-IN" sz="1400" dirty="0"/>
-                        <a:t>Very High</a:t>
-                      </a:r>
-                    </a:p>
-                  </a:txBody>
-                  <a:tcPr anchor="ctr">
-                    <a:lnL>
-                      <a:noFill/>
-                    </a:lnL>
-                    <a:lnR>
-                      <a:noFill/>
-                    </a:lnR>
-                    <a:lnT>
-                      <a:noFill/>
-                    </a:lnT>
-                    <a:lnB>
-                      <a:noFill/>
-                    </a:lnB>
-                    <a:noFill/>
-                  </a:tcPr>
-                </a:tc>
-                <a:extLst>
-                  <a:ext uri="{0D108BD9-81ED-4DB2-BD59-A6C34878D82A}">
-                    <a16:rowId xmlns:a16="http://schemas.microsoft.com/office/drawing/2014/main" val="2209114627"/>
-                  </a:ext>
-                </a:extLst>
-              </a:tr>
-            </a:tbl>
-          </a:graphicData>
-        </a:graphic>
-      </p:graphicFrame>
+          </p:nvPr>
+        </p:nvSpPr>
+        <p:spPr/>
+        <p:txBody>
+          <a:bodyPr>
+            <a:normAutofit/>
+          </a:bodyPr>
+          <a:lstStyle/>
+          <a:p>
+            <a:pPr marL="0" indent="0">
+              <a:buNone/>
+            </a:pPr>
+            <a:r>
+              <a:rPr lang="en-IN" sz="2800" b="1" dirty="0"/>
+              <a:t>	</a:t>
+            </a:r>
+            <a:r>
+              <a:rPr lang="en-IN" sz="2400" b="1" dirty="0"/>
+              <a:t>Spring Boot vs </a:t>
+            </a:r>
+            <a:r>
+              <a:rPr lang="en-IN" sz="2400" b="1" dirty="0" err="1"/>
+              <a:t>Quarkus</a:t>
+            </a:r>
+            <a:endParaRPr lang="en-IN" sz="2400" dirty="0"/>
+          </a:p>
+          <a:p>
+            <a:pPr marL="800100" lvl="2" indent="0">
+              <a:buNone/>
+            </a:pPr>
+            <a:r>
+              <a:rPr lang="en-IN" dirty="0"/>
+              <a:t>Startup → </a:t>
+            </a:r>
+            <a:r>
+              <a:rPr lang="en-IN" dirty="0" err="1"/>
+              <a:t>Quarkus</a:t>
+            </a:r>
+            <a:r>
+              <a:rPr lang="en-IN" dirty="0"/>
+              <a:t> ⚡ </a:t>
+            </a:r>
+          </a:p>
+          <a:p>
+            <a:pPr marL="800100" lvl="2" indent="0">
+              <a:buNone/>
+            </a:pPr>
+            <a:r>
+              <a:rPr lang="en-IN" dirty="0"/>
+              <a:t>Memory → </a:t>
+            </a:r>
+            <a:r>
+              <a:rPr lang="en-IN" dirty="0" err="1"/>
+              <a:t>Quarkus</a:t>
+            </a:r>
+            <a:r>
+              <a:rPr lang="en-IN" dirty="0"/>
+              <a:t> </a:t>
+            </a:r>
+          </a:p>
+          <a:p>
+            <a:pPr marL="800100" lvl="2" indent="0">
+              <a:buNone/>
+            </a:pPr>
+            <a:r>
+              <a:rPr lang="en-IN" dirty="0"/>
+              <a:t>Community → Spring Boot 🌍 </a:t>
+            </a:r>
+          </a:p>
+          <a:p>
+            <a:pPr marL="800100" lvl="2" indent="0">
+              <a:buNone/>
+            </a:pPr>
+            <a:r>
+              <a:rPr lang="en-IN" dirty="0"/>
+              <a:t>Learning → Spring Boot </a:t>
+            </a:r>
+          </a:p>
+          <a:p>
+            <a:pPr marL="800100" lvl="2" indent="0">
+              <a:buNone/>
+            </a:pPr>
+            <a:r>
+              <a:rPr lang="en-IN" dirty="0"/>
+              <a:t>💡 </a:t>
+            </a:r>
+            <a:r>
+              <a:rPr lang="en-IN" i="1" dirty="0"/>
+              <a:t>Right tool depends on use case</a:t>
+            </a:r>
+            <a:endParaRPr lang="en-IN" dirty="0"/>
+          </a:p>
+        </p:txBody>
+      </p:sp>
     </p:spTree>
+    <p:extLst>
+      <p:ext uri="{BB962C8B-B14F-4D97-AF65-F5344CB8AC3E}">
+        <p14:creationId xmlns:p14="http://schemas.microsoft.com/office/powerpoint/2010/main" val="1700086400"/>
+      </p:ext>
+    </p:extLst>
   </p:cSld>
   <p:clrMapOvr>
     <a:masterClrMapping/>
@@ -4949,7 +4122,13 @@
   <p:cSld>
     <p:spTree>
       <p:nvGrpSpPr>
-        <p:cNvPr id="1" name=""/>
+        <p:cNvPr id="1" name="">
+          <a:extLst>
+            <a:ext uri="{FF2B5EF4-FFF2-40B4-BE49-F238E27FC236}">
+              <a16:creationId xmlns:a16="http://schemas.microsoft.com/office/drawing/2014/main" id="{F68BCCEA-574D-831A-0D56-21416030E25B}"/>
+            </a:ext>
+          </a:extLst>
+        </p:cNvPr>
         <p:cNvGrpSpPr/>
         <p:nvPr/>
       </p:nvGrpSpPr>
@@ -4966,7 +4145,7 @@
           <p:cNvPr id="2" name="Title 1">
             <a:extLst>
               <a:ext uri="{FF2B5EF4-FFF2-40B4-BE49-F238E27FC236}">
-                <a16:creationId xmlns:a16="http://schemas.microsoft.com/office/drawing/2014/main" id="{47EEA08B-2524-A8E5-8D80-0484F6DDBC83}"/>
+                <a16:creationId xmlns:a16="http://schemas.microsoft.com/office/drawing/2014/main" id="{04A81065-AF9A-DEAA-4FDC-BA4B13BE0AAC}"/>
               </a:ext>
             </a:extLst>
           </p:cNvPr>
@@ -4977,15 +4156,10 @@
             <p:ph type="title"/>
           </p:nvPr>
         </p:nvSpPr>
-        <p:spPr>
-          <a:xfrm>
-            <a:off x="457200" y="274638"/>
-            <a:ext cx="8229600" cy="457199"/>
-          </a:xfrm>
-        </p:spPr>
+        <p:spPr/>
         <p:txBody>
           <a:bodyPr>
-            <a:normAutofit fontScale="90000"/>
+            <a:normAutofit/>
           </a:bodyPr>
           <a:lstStyle/>
           <a:p>
@@ -4997,7 +4171,7 @@
               <a:rPr lang="en-US" b="1" dirty="0"/>
               <a:t>Spring Boot</a:t>
             </a:r>
-            <a:endParaRPr lang="en-IN" dirty="0"/>
+            <a:endParaRPr lang="en-IN" b="1" dirty="0"/>
           </a:p>
         </p:txBody>
       </p:sp>
@@ -5006,7 +4180,7 @@
           <p:cNvPr id="3" name="Content Placeholder 2">
             <a:extLst>
               <a:ext uri="{FF2B5EF4-FFF2-40B4-BE49-F238E27FC236}">
-                <a16:creationId xmlns:a16="http://schemas.microsoft.com/office/drawing/2014/main" id="{C834AD81-B7A7-D89D-75EC-1C51A3495D49}"/>
+                <a16:creationId xmlns:a16="http://schemas.microsoft.com/office/drawing/2014/main" id="{501F31B9-053B-D85A-AAC5-725FF40A7FF9}"/>
               </a:ext>
             </a:extLst>
           </p:cNvPr>
@@ -5014,343 +4188,46 @@
             <a:spLocks noGrp="1"/>
           </p:cNvSpPr>
           <p:nvPr>
-            <p:ph sz="half" idx="1"/>
-          </p:nvPr>
-        </p:nvSpPr>
-        <p:spPr>
-          <a:xfrm>
-            <a:off x="457200" y="1065944"/>
-            <a:ext cx="4038600" cy="5221840"/>
-          </a:xfrm>
-        </p:spPr>
-        <p:txBody>
-          <a:bodyPr>
-            <a:noAutofit/>
-          </a:bodyPr>
-          <a:lstStyle/>
-          <a:p>
-            <a:pPr marL="0" indent="0">
-              <a:buNone/>
-            </a:pPr>
-            <a:r>
-              <a:rPr lang="en-US" sz="1400" dirty="0"/>
-              <a:t>Use </a:t>
-            </a:r>
-            <a:r>
-              <a:rPr lang="en-US" sz="1400" b="1" dirty="0"/>
-              <a:t>Spring Boot</a:t>
-            </a:r>
-            <a:r>
-              <a:rPr lang="en-US" sz="1400" dirty="0"/>
-              <a:t> when stability, ecosystem, and flexibility matter most.</a:t>
-            </a:r>
-            <a:endParaRPr lang="en-US" sz="1400" b="1" dirty="0"/>
-          </a:p>
-          <a:p>
-            <a:pPr marL="0" indent="0">
-              <a:buNone/>
-            </a:pPr>
-            <a:r>
-              <a:rPr lang="en-US" sz="1400" b="1" dirty="0"/>
-              <a:t>1. Enterprise / Large Applications</a:t>
-            </a:r>
-          </a:p>
-          <a:p>
-            <a:pPr marL="0" indent="0">
-              <a:buNone/>
-            </a:pPr>
-            <a:r>
-              <a:rPr lang="en-US" sz="1400" dirty="0"/>
-              <a:t>Complex business logic</a:t>
-            </a:r>
-          </a:p>
-          <a:p>
-            <a:pPr marL="0" indent="0">
-              <a:buNone/>
-            </a:pPr>
-            <a:r>
-              <a:rPr lang="en-US" sz="1400" dirty="0"/>
-              <a:t>Long-running services</a:t>
-            </a:r>
-          </a:p>
-          <a:p>
-            <a:pPr marL="0" indent="0">
-              <a:buNone/>
-            </a:pPr>
-            <a:r>
-              <a:rPr lang="en-US" sz="1400" dirty="0"/>
-              <a:t>Banking, insurance, enterprise SaaS</a:t>
-            </a:r>
-          </a:p>
-          <a:p>
-            <a:pPr marL="0" indent="0">
-              <a:buNone/>
-            </a:pPr>
-            <a:r>
-              <a:rPr lang="en-US" sz="1400" dirty="0"/>
-              <a:t>👉 Why?</a:t>
-            </a:r>
-          </a:p>
-          <a:p>
-            <a:pPr marL="0" indent="0">
-              <a:buNone/>
-            </a:pPr>
-            <a:r>
-              <a:rPr lang="en-US" sz="1400" dirty="0"/>
-              <a:t>Mature ecosystem (Spring Security, Spring Data, etc.)</a:t>
-            </a:r>
-          </a:p>
-          <a:p>
-            <a:pPr marL="0" indent="0">
-              <a:buNone/>
-            </a:pPr>
-            <a:r>
-              <a:rPr lang="en-US" sz="1400" dirty="0"/>
-              <a:t>Huge community support</a:t>
-            </a:r>
-          </a:p>
-          <a:p>
-            <a:pPr marL="0" indent="0">
-              <a:buNone/>
-            </a:pPr>
-            <a:r>
-              <a:rPr lang="en-US" sz="1400" dirty="0"/>
-              <a:t>Easier hiring &amp; onboarding</a:t>
-            </a:r>
-          </a:p>
-          <a:p>
-            <a:pPr marL="0" indent="0">
-              <a:buNone/>
-            </a:pPr>
-            <a:endParaRPr lang="en-US" sz="1400" dirty="0"/>
-          </a:p>
-          <a:p>
-            <a:pPr marL="0" indent="0">
-              <a:buNone/>
-            </a:pPr>
-            <a:r>
-              <a:rPr lang="en-US" sz="1400" b="1" dirty="0"/>
-              <a:t>2. Microservices (Traditional style)</a:t>
-            </a:r>
-          </a:p>
-          <a:p>
-            <a:pPr marL="0" indent="0">
-              <a:buNone/>
-            </a:pPr>
-            <a:r>
-              <a:rPr lang="en-US" sz="1400" dirty="0"/>
-              <a:t>REST APIs</a:t>
-            </a:r>
-          </a:p>
-          <a:p>
-            <a:pPr marL="0" indent="0">
-              <a:buNone/>
-            </a:pPr>
-            <a:r>
-              <a:rPr lang="en-US" sz="1400" dirty="0"/>
-              <a:t>CRUD-heavy services</a:t>
-            </a:r>
-          </a:p>
-          <a:p>
-            <a:pPr marL="0" indent="0">
-              <a:buNone/>
-            </a:pPr>
-            <a:r>
-              <a:rPr lang="en-US" sz="1400" dirty="0"/>
-              <a:t>Service-to-service communication</a:t>
-            </a:r>
-          </a:p>
-          <a:p>
-            <a:pPr marL="0" indent="0">
-              <a:buNone/>
-            </a:pPr>
-            <a:r>
-              <a:rPr lang="en-US" sz="1400" dirty="0"/>
-              <a:t>👉 Works great with:</a:t>
-            </a:r>
-          </a:p>
-          <a:p>
-            <a:pPr marL="0" indent="0">
-              <a:buNone/>
-            </a:pPr>
-            <a:r>
-              <a:rPr lang="en-US" sz="1400" dirty="0"/>
-              <a:t>Spring Cloud</a:t>
-            </a:r>
-          </a:p>
-          <a:p>
-            <a:pPr marL="0" indent="0">
-              <a:buNone/>
-            </a:pPr>
-            <a:r>
-              <a:rPr lang="en-US" sz="1400" dirty="0"/>
-              <a:t>Netflix OSS stack</a:t>
-            </a:r>
-          </a:p>
-          <a:p>
-            <a:pPr marL="0" indent="0">
-              <a:buNone/>
-            </a:pPr>
-            <a:endParaRPr lang="en-IN" sz="1400" dirty="0"/>
-          </a:p>
-        </p:txBody>
-      </p:sp>
-      <p:sp>
-        <p:nvSpPr>
-          <p:cNvPr id="4" name="Content Placeholder 3">
-            <a:extLst>
-              <a:ext uri="{FF2B5EF4-FFF2-40B4-BE49-F238E27FC236}">
-                <a16:creationId xmlns:a16="http://schemas.microsoft.com/office/drawing/2014/main" id="{6020B4FB-144F-4746-D6E7-7B7A44FFF53C}"/>
-              </a:ext>
-            </a:extLst>
-          </p:cNvPr>
-          <p:cNvSpPr>
-            <a:spLocks noGrp="1"/>
-          </p:cNvSpPr>
-          <p:nvPr>
-            <p:ph sz="half" idx="2"/>
-          </p:nvPr>
-        </p:nvSpPr>
-        <p:spPr>
-          <a:xfrm>
-            <a:off x="4572000" y="1166018"/>
-            <a:ext cx="4114800" cy="4792993"/>
-          </a:xfrm>
-        </p:spPr>
+            <p:ph idx="1"/>
+          </p:nvPr>
+        </p:nvSpPr>
+        <p:spPr/>
         <p:txBody>
           <a:bodyPr>
             <a:normAutofit/>
           </a:bodyPr>
           <a:lstStyle/>
           <a:p>
-            <a:pPr marL="0" indent="0">
-              <a:buNone/>
-            </a:pPr>
-            <a:r>
-              <a:rPr lang="en-US" sz="1400" b="1" dirty="0"/>
-              <a:t>3. When Team Experience Matters</a:t>
-            </a:r>
-          </a:p>
-          <a:p>
-            <a:pPr marL="0" indent="0">
-              <a:buNone/>
-            </a:pPr>
-            <a:r>
-              <a:rPr lang="en-US" sz="1400" dirty="0"/>
-              <a:t>Your team already knows Spring</a:t>
-            </a:r>
-          </a:p>
-          <a:p>
-            <a:pPr marL="0" indent="0">
-              <a:buNone/>
-            </a:pPr>
-            <a:r>
-              <a:rPr lang="en-US" sz="1400" dirty="0"/>
-              <a:t>Faster development due to familiarity</a:t>
-            </a:r>
-          </a:p>
-          <a:p>
-            <a:pPr marL="0" indent="0">
-              <a:buNone/>
-            </a:pPr>
-            <a:br>
-              <a:rPr lang="en-US" sz="1400" dirty="0"/>
-            </a:br>
-            <a:endParaRPr lang="en-US" sz="1400" dirty="0"/>
-          </a:p>
-          <a:p>
-            <a:pPr marL="0" indent="0">
-              <a:buNone/>
-            </a:pPr>
-            <a:r>
-              <a:rPr lang="en-US" sz="1400" b="1" dirty="0"/>
-              <a:t>4. Rich Feature Requirements</a:t>
-            </a:r>
-          </a:p>
-          <a:p>
-            <a:pPr marL="0" indent="0">
-              <a:buNone/>
-            </a:pPr>
-            <a:r>
-              <a:rPr lang="en-US" sz="1400" dirty="0"/>
-              <a:t>Security (OAuth2, JWT)</a:t>
-            </a:r>
-          </a:p>
-          <a:p>
-            <a:pPr marL="0" indent="0">
-              <a:buNone/>
-            </a:pPr>
-            <a:r>
-              <a:rPr lang="en-US" sz="1400" dirty="0"/>
-              <a:t>Transactions</a:t>
-            </a:r>
-          </a:p>
-          <a:p>
-            <a:pPr marL="0" indent="0">
-              <a:buNone/>
-            </a:pPr>
-            <a:r>
-              <a:rPr lang="en-US" sz="1400" dirty="0"/>
-              <a:t>Batch processing</a:t>
-            </a:r>
-          </a:p>
-          <a:p>
-            <a:pPr marL="0" indent="0">
-              <a:buNone/>
-            </a:pPr>
-            <a:r>
-              <a:rPr lang="en-US" sz="1400" dirty="0"/>
-              <a:t>👉 Spring gives everything out-of-the-box.</a:t>
-            </a:r>
-          </a:p>
-          <a:p>
-            <a:pPr marL="0" indent="0">
-              <a:buNone/>
-            </a:pPr>
-            <a:br>
-              <a:rPr lang="en-US" sz="1400" dirty="0"/>
-            </a:br>
-            <a:endParaRPr lang="en-US" sz="1400" dirty="0"/>
-          </a:p>
-          <a:p>
-            <a:pPr marL="0" indent="0">
-              <a:buNone/>
-            </a:pPr>
-            <a:r>
-              <a:rPr lang="en-US" sz="1400" b="1" dirty="0"/>
-              <a:t>⚠️ Not Ideal When:</a:t>
-            </a:r>
-          </a:p>
-          <a:p>
-            <a:pPr marL="0" indent="0">
-              <a:buNone/>
-            </a:pPr>
-            <a:r>
-              <a:rPr lang="en-US" sz="1400" dirty="0"/>
-              <a:t>You need ultra-fast startup</a:t>
-            </a:r>
-          </a:p>
-          <a:p>
-            <a:pPr marL="0" indent="0">
-              <a:buNone/>
-            </a:pPr>
-            <a:r>
-              <a:rPr lang="en-US" sz="1400" dirty="0"/>
-              <a:t>Memory is limited (e.g., serverless)</a:t>
-            </a:r>
-          </a:p>
-          <a:p>
-            <a:pPr marL="0" indent="0">
-              <a:buNone/>
-            </a:pPr>
-            <a:endParaRPr lang="en-IN" sz="1400" dirty="0"/>
+            <a:r>
+              <a:rPr lang="en-US" sz="2800" dirty="0"/>
+              <a:t>Enterprise Applications</a:t>
+            </a:r>
+          </a:p>
+          <a:p>
+            <a:r>
+              <a:rPr lang="en-US" sz="2800" dirty="0"/>
+              <a:t>Banking / Large Systems</a:t>
+            </a:r>
+          </a:p>
+          <a:p>
+            <a:r>
+              <a:rPr lang="en-US" sz="2800" dirty="0"/>
+              <a:t>Rich Features Needed</a:t>
+            </a:r>
+          </a:p>
+          <a:p>
+            <a:r>
+              <a:rPr lang="en-US" sz="2800" dirty="0"/>
+              <a:t>Team already knows Spring</a:t>
+            </a:r>
+            <a:endParaRPr lang="en-IN" dirty="0"/>
           </a:p>
         </p:txBody>
       </p:sp>
     </p:spTree>
     <p:extLst>
       <p:ext uri="{BB962C8B-B14F-4D97-AF65-F5344CB8AC3E}">
-        <p14:creationId xmlns:p14="http://schemas.microsoft.com/office/powerpoint/2010/main" val="1616301201"/>
+        <p14:creationId xmlns:p14="http://schemas.microsoft.com/office/powerpoint/2010/main" val="3113697512"/>
       </p:ext>
     </p:extLst>
   </p:cSld>
@@ -5804,7 +4681,13 @@
       </p:grpSpPr>
       <p:sp>
         <p:nvSpPr>
-          <p:cNvPr id="2" name="Title 1"/>
+          <p:cNvPr id="2" name="Title 1">
+            <a:extLst>
+              <a:ext uri="{FF2B5EF4-FFF2-40B4-BE49-F238E27FC236}">
+                <a16:creationId xmlns:a16="http://schemas.microsoft.com/office/drawing/2014/main" id="{A1147624-BE50-2A53-CB6C-223931DA61B3}"/>
+              </a:ext>
+            </a:extLst>
+          </p:cNvPr>
           <p:cNvSpPr>
             <a:spLocks noGrp="1"/>
           </p:cNvSpPr>
@@ -5814,24 +4697,43 @@
         </p:nvSpPr>
         <p:spPr/>
         <p:txBody>
-          <a:bodyPr/>
-          <a:lstStyle/>
-          <a:p>
-            <a:r>
-              <a:rPr dirty="0"/>
-              <a:t>When to Use </a:t>
-            </a:r>
-            <a:r>
-              <a:rPr dirty="0" err="1"/>
+          <a:bodyPr>
+            <a:normAutofit fontScale="90000"/>
+          </a:bodyPr>
+          <a:lstStyle/>
+          <a:p>
+            <a:r>
+              <a:rPr lang="en-US" dirty="0"/>
+              <a:t>🚫 </a:t>
+            </a:r>
+            <a:r>
+              <a:rPr lang="en-US" b="1" dirty="0"/>
+              <a:t>When NOT to Use </a:t>
+            </a:r>
+            <a:r>
+              <a:rPr lang="en-US" b="1" dirty="0" err="1"/>
               <a:t>Quarkus</a:t>
             </a:r>
-            <a:endParaRPr dirty="0"/>
-          </a:p>
-        </p:txBody>
-      </p:sp>
-      <p:sp>
-        <p:nvSpPr>
-          <p:cNvPr id="3" name="Content Placeholder 2"/>
+            <a:r>
+              <a:rPr lang="en-US" b="1" dirty="0"/>
+              <a:t>?</a:t>
+            </a:r>
+            <a:br>
+              <a:rPr lang="en-US" dirty="0"/>
+            </a:br>
+            <a:endParaRPr lang="en-IN" dirty="0"/>
+          </a:p>
+        </p:txBody>
+      </p:sp>
+      <p:sp>
+        <p:nvSpPr>
+          <p:cNvPr id="3" name="Content Placeholder 2">
+            <a:extLst>
+              <a:ext uri="{FF2B5EF4-FFF2-40B4-BE49-F238E27FC236}">
+                <a16:creationId xmlns:a16="http://schemas.microsoft.com/office/drawing/2014/main" id="{BAE716DC-DC4B-0535-21F9-BE3BFD9A645D}"/>
+              </a:ext>
+            </a:extLst>
+          </p:cNvPr>
           <p:cNvSpPr>
             <a:spLocks noGrp="1"/>
           </p:cNvSpPr>
@@ -5842,7 +4744,7 @@
         <p:spPr/>
         <p:txBody>
           <a:bodyPr>
-            <a:normAutofit fontScale="92500" lnSpcReduction="10000"/>
+            <a:normAutofit lnSpcReduction="10000"/>
           </a:bodyPr>
           <a:lstStyle/>
           <a:p>
@@ -5850,138 +4752,140 @@
               <a:buNone/>
             </a:pPr>
             <a:r>
-              <a:rPr lang="en-IN" sz="2000" dirty="0"/>
-              <a:t>☁️ </a:t>
+              <a:rPr lang="en-US" sz="2000" dirty="0"/>
+              <a:t>🏢 </a:t>
+            </a:r>
+            <a:r>
+              <a:rPr lang="en-US" sz="2000" b="1" dirty="0"/>
+              <a:t>Traditional Monolithic Applications</a:t>
+            </a:r>
+            <a:br>
+              <a:rPr lang="en-US" sz="2000" dirty="0"/>
+            </a:br>
+            <a:r>
+              <a:rPr lang="en-US" sz="2000" dirty="0"/>
+              <a:t>Spring Boot is often simpler &amp; more mature here</a:t>
+            </a:r>
+          </a:p>
+          <a:p>
+            <a:pPr marL="0" indent="0">
+              <a:buNone/>
+            </a:pPr>
+            <a:r>
+              <a:rPr lang="en-US" sz="2000" dirty="0"/>
+              <a:t>📚 </a:t>
+            </a:r>
+            <a:r>
+              <a:rPr lang="en-US" sz="2000" b="1" dirty="0"/>
+              <a:t>Need Large Ecosystem Support</a:t>
+            </a:r>
+            <a:br>
+              <a:rPr lang="en-US" sz="2000" dirty="0"/>
+            </a:br>
+            <a:r>
+              <a:rPr lang="en-US" sz="2000" dirty="0"/>
+              <a:t>Spring has a much larger ecosystem &amp; integrations</a:t>
+            </a:r>
+          </a:p>
+          <a:p>
+            <a:pPr marL="0" indent="0">
+              <a:buNone/>
+            </a:pPr>
+            <a:r>
+              <a:rPr lang="en-US" sz="2000" dirty="0"/>
+              <a:t>👨‍💻 </a:t>
+            </a:r>
+            <a:r>
+              <a:rPr lang="en-US" sz="2000" b="1" dirty="0"/>
+              <a:t>Team is Already Deep into Spring</a:t>
+            </a:r>
+            <a:br>
+              <a:rPr lang="en-US" sz="2000" dirty="0"/>
+            </a:br>
+            <a:r>
+              <a:rPr lang="en-US" sz="2000" dirty="0"/>
+              <a:t>Switching may reduce productivity initially</a:t>
+            </a:r>
+          </a:p>
+          <a:p>
+            <a:pPr marL="0" indent="0">
+              <a:buNone/>
+            </a:pPr>
+            <a:r>
+              <a:rPr lang="en-US" sz="2000" dirty="0"/>
+              <a:t>🧩 </a:t>
+            </a:r>
+            <a:r>
+              <a:rPr lang="en-US" sz="2000" b="1" dirty="0"/>
+              <a:t>Simple CRUD Applications</a:t>
+            </a:r>
+            <a:br>
+              <a:rPr lang="en-US" sz="2000" dirty="0"/>
+            </a:br>
+            <a:r>
+              <a:rPr lang="en-US" sz="2000" dirty="0" err="1"/>
+              <a:t>Quarkus</a:t>
+            </a:r>
+            <a:r>
+              <a:rPr lang="en-US" sz="2000" dirty="0"/>
+              <a:t> might feel like over-optimization</a:t>
+            </a:r>
+          </a:p>
+          <a:p>
+            <a:pPr marL="0" indent="0">
+              <a:buNone/>
+            </a:pPr>
+            <a:r>
+              <a:rPr lang="en-US" sz="2000" dirty="0"/>
+              <a:t>⏳</a:t>
             </a:r>
             <a:r>
               <a:rPr lang="en-IN" sz="2000" b="1" dirty="0"/>
-              <a:t>Building Cloud-Native Applications</a:t>
+              <a:t>No performance need</a:t>
             </a:r>
             <a:br>
-              <a:rPr lang="en-IN" sz="2000" dirty="0"/>
+              <a:rPr lang="en-US" sz="2000" dirty="0"/>
             </a:br>
             <a:r>
-              <a:rPr lang="en-IN" sz="2000" dirty="0"/>
-              <a:t>Perfect for Kubernetes, Docker &amp; modern deployments</a:t>
-            </a:r>
-          </a:p>
-          <a:p>
-            <a:pPr marL="0" indent="0">
-              <a:buNone/>
-            </a:pPr>
-            <a:r>
-              <a:rPr lang="en-IN" sz="2000" dirty="0"/>
-              <a:t>⚡ </a:t>
-            </a:r>
-            <a:r>
-              <a:rPr lang="en-IN" sz="2000" b="1" dirty="0"/>
-              <a:t>Need Fast Startup &amp; Low Memory</a:t>
+              <a:rPr lang="en-US" sz="2000" dirty="0" err="1"/>
+              <a:t>Quarkus</a:t>
+            </a:r>
+            <a:r>
+              <a:rPr lang="en-US" sz="2000" dirty="0"/>
+              <a:t> strengths won’t add much value</a:t>
+            </a:r>
+          </a:p>
+          <a:p>
+            <a:pPr marL="0" indent="0">
+              <a:buNone/>
+            </a:pPr>
+            <a:r>
+              <a:rPr lang="en-US" sz="2000" dirty="0"/>
+              <a:t>🔌 </a:t>
+            </a:r>
+            <a:r>
+              <a:rPr lang="en-US" sz="2000" b="1" dirty="0"/>
+              <a:t>Heavy Dependency on Spring Features</a:t>
             </a:r>
             <a:br>
-              <a:rPr lang="en-IN" sz="2000" dirty="0"/>
+              <a:rPr lang="en-US" sz="2000" dirty="0"/>
             </a:br>
             <a:r>
-              <a:rPr lang="en-IN" sz="2000" dirty="0"/>
-              <a:t>Ideal for microservices and high-scale systems</a:t>
-            </a:r>
-          </a:p>
-          <a:p>
-            <a:pPr marL="0" indent="0">
-              <a:buNone/>
-            </a:pPr>
-            <a:r>
-              <a:rPr lang="en-IN" sz="2000" dirty="0"/>
-              <a:t>🧩 </a:t>
-            </a:r>
-            <a:r>
-              <a:rPr lang="en-IN" sz="2000" b="1" dirty="0"/>
-              <a:t>Reactive &amp; High-Concurrency Systems</a:t>
-            </a:r>
-            <a:br>
-              <a:rPr lang="en-IN" sz="2000" dirty="0"/>
-            </a:br>
-            <a:r>
-              <a:rPr lang="en-IN" sz="2000" dirty="0"/>
-              <a:t>Best for handling thousands of requests efficiently</a:t>
-            </a:r>
-          </a:p>
-          <a:p>
-            <a:pPr marL="0" indent="0">
-              <a:buNone/>
-            </a:pPr>
-            <a:r>
-              <a:rPr lang="en-IN" sz="2000" dirty="0"/>
-              <a:t>🐳 </a:t>
-            </a:r>
-            <a:r>
-              <a:rPr lang="en-IN" sz="2000" b="1" dirty="0"/>
-              <a:t>Container &amp; Serverless Environments</a:t>
-            </a:r>
-            <a:br>
-              <a:rPr lang="en-IN" sz="2000" dirty="0"/>
-            </a:br>
-            <a:r>
-              <a:rPr lang="en-IN" sz="2000" dirty="0"/>
-              <a:t>Optimized for lightweight and fast-running apps</a:t>
-            </a:r>
-          </a:p>
-          <a:p>
-            <a:pPr marL="0" indent="0">
-              <a:buNone/>
-            </a:pPr>
-            <a:r>
-              <a:rPr lang="en-IN" sz="2000" dirty="0"/>
-              <a:t>🚀 </a:t>
-            </a:r>
-            <a:r>
-              <a:rPr lang="en-IN" sz="2000" b="1" dirty="0"/>
-              <a:t>Faster Development Cycles</a:t>
-            </a:r>
-            <a:br>
-              <a:rPr lang="en-IN" sz="2000" dirty="0"/>
-            </a:br>
-            <a:r>
-              <a:rPr lang="en-IN" sz="2000" dirty="0"/>
-              <a:t>Live reload + dev mode boosts productivity</a:t>
-            </a:r>
-          </a:p>
-          <a:p>
-            <a:pPr marL="0" indent="0">
-              <a:buNone/>
-            </a:pPr>
-            <a:r>
-              <a:rPr lang="en-IN" sz="2000" dirty="0"/>
-              <a:t>🌍 </a:t>
-            </a:r>
-            <a:r>
-              <a:rPr lang="en-IN" sz="2000" b="1" dirty="0"/>
-              <a:t>Microservices Architecture</a:t>
-            </a:r>
-            <a:br>
-              <a:rPr lang="en-IN" sz="2000" dirty="0"/>
-            </a:br>
-            <a:r>
-              <a:rPr lang="en-IN" sz="2000" dirty="0"/>
-              <a:t>Great for distributed, scalable systems</a:t>
-            </a:r>
-          </a:p>
-          <a:p>
-            <a:pPr marL="0" indent="0">
-              <a:buNone/>
-            </a:pPr>
-            <a:endParaRPr lang="en-IN" sz="2000" dirty="0"/>
-          </a:p>
-          <a:p>
-            <a:pPr marL="0" indent="0">
-              <a:buNone/>
-            </a:pPr>
-            <a:r>
               <a:rPr lang="en-US" sz="2000" dirty="0"/>
-              <a:t>	💡 </a:t>
+              <a:t>Rewriting or adapting may take extra effort</a:t>
+            </a:r>
+          </a:p>
+          <a:p>
+            <a:pPr marL="0" indent="0">
+              <a:buNone/>
+            </a:pPr>
+            <a:r>
+              <a:rPr lang="en-US" sz="2000" dirty="0"/>
+              <a:t> 💡 </a:t>
             </a:r>
             <a:r>
               <a:rPr lang="en-US" sz="2000" i="1" dirty="0"/>
-              <a:t>Use </a:t>
+              <a:t>Choose </a:t>
             </a:r>
             <a:r>
               <a:rPr lang="en-US" sz="2000" i="1" dirty="0" err="1"/>
@@ -5989,13 +4893,24 @@
             </a:r>
             <a:r>
               <a:rPr lang="en-US" sz="2000" i="1" dirty="0"/>
-              <a:t> when performance, scalability, and cloud-native design 	matter most.</a:t>
-            </a:r>
+              <a:t> for performance &amp; cloud-native needs — not for every    	project.</a:t>
+            </a:r>
+            <a:endParaRPr lang="en-US" sz="2000" dirty="0"/>
+          </a:p>
+          <a:p>
+            <a:pPr marL="0" indent="0">
+              <a:buNone/>
+            </a:pPr>
             <a:endParaRPr lang="en-IN" sz="2000" dirty="0"/>
           </a:p>
         </p:txBody>
       </p:sp>
     </p:spTree>
+    <p:extLst>
+      <p:ext uri="{BB962C8B-B14F-4D97-AF65-F5344CB8AC3E}">
+        <p14:creationId xmlns:p14="http://schemas.microsoft.com/office/powerpoint/2010/main" val="2141617547"/>
+      </p:ext>
+    </p:extLst>
   </p:cSld>
   <p:clrMapOvr>
     <a:masterClrMapping/>
